--- a/Heat-tree_annotation.pptx
+++ b/Heat-tree_annotation.pptx
@@ -6,6 +6,9 @@
   </p:sldMasterIdLst>
   <p:sldIdLst>
     <p:sldId id="256" r:id="rId2"/>
+    <p:sldId id="258" r:id="rId3"/>
+    <p:sldId id="261" r:id="rId4"/>
+    <p:sldId id="259" r:id="rId5"/>
   </p:sldIdLst>
   <p:sldSz cx="12192000" cy="6858000"/>
   <p:notesSz cx="6858000" cy="9144000"/>
@@ -104,6 +107,11 @@
       </a:defRPr>
     </a:lvl9pPr>
   </p:defaultTextStyle>
+  <p:extLst>
+    <p:ext uri="{EFAFB233-063F-42B5-8137-9DF3F51BA10A}">
+      <p15:sldGuideLst xmlns:p15="http://schemas.microsoft.com/office/powerpoint/2012/main"/>
+    </p:ext>
+  </p:extLst>
 </p:presentation>
 </file>
 
@@ -254,7 +262,7 @@
           <a:p>
             <a:fld id="{851C1364-0D93-CF4B-91C1-DFD523C3DABF}" type="datetimeFigureOut">
               <a:rPr lang="en-US" smtClean="0"/>
-              <a:t>8/19/25</a:t>
+              <a:t>8/22/25</a:t>
             </a:fld>
             <a:endParaRPr lang="en-US"/>
           </a:p>
@@ -452,7 +460,7 @@
           <a:p>
             <a:fld id="{851C1364-0D93-CF4B-91C1-DFD523C3DABF}" type="datetimeFigureOut">
               <a:rPr lang="en-US" smtClean="0"/>
-              <a:t>8/19/25</a:t>
+              <a:t>8/22/25</a:t>
             </a:fld>
             <a:endParaRPr lang="en-US"/>
           </a:p>
@@ -660,7 +668,7 @@
           <a:p>
             <a:fld id="{851C1364-0D93-CF4B-91C1-DFD523C3DABF}" type="datetimeFigureOut">
               <a:rPr lang="en-US" smtClean="0"/>
-              <a:t>8/19/25</a:t>
+              <a:t>8/22/25</a:t>
             </a:fld>
             <a:endParaRPr lang="en-US"/>
           </a:p>
@@ -858,7 +866,7 @@
           <a:p>
             <a:fld id="{851C1364-0D93-CF4B-91C1-DFD523C3DABF}" type="datetimeFigureOut">
               <a:rPr lang="en-US" smtClean="0"/>
-              <a:t>8/19/25</a:t>
+              <a:t>8/22/25</a:t>
             </a:fld>
             <a:endParaRPr lang="en-US"/>
           </a:p>
@@ -1133,7 +1141,7 @@
           <a:p>
             <a:fld id="{851C1364-0D93-CF4B-91C1-DFD523C3DABF}" type="datetimeFigureOut">
               <a:rPr lang="en-US" smtClean="0"/>
-              <a:t>8/19/25</a:t>
+              <a:t>8/22/25</a:t>
             </a:fld>
             <a:endParaRPr lang="en-US"/>
           </a:p>
@@ -1398,7 +1406,7 @@
           <a:p>
             <a:fld id="{851C1364-0D93-CF4B-91C1-DFD523C3DABF}" type="datetimeFigureOut">
               <a:rPr lang="en-US" smtClean="0"/>
-              <a:t>8/19/25</a:t>
+              <a:t>8/22/25</a:t>
             </a:fld>
             <a:endParaRPr lang="en-US"/>
           </a:p>
@@ -1810,7 +1818,7 @@
           <a:p>
             <a:fld id="{851C1364-0D93-CF4B-91C1-DFD523C3DABF}" type="datetimeFigureOut">
               <a:rPr lang="en-US" smtClean="0"/>
-              <a:t>8/19/25</a:t>
+              <a:t>8/22/25</a:t>
             </a:fld>
             <a:endParaRPr lang="en-US"/>
           </a:p>
@@ -1951,7 +1959,7 @@
           <a:p>
             <a:fld id="{851C1364-0D93-CF4B-91C1-DFD523C3DABF}" type="datetimeFigureOut">
               <a:rPr lang="en-US" smtClean="0"/>
-              <a:t>8/19/25</a:t>
+              <a:t>8/22/25</a:t>
             </a:fld>
             <a:endParaRPr lang="en-US"/>
           </a:p>
@@ -2064,7 +2072,7 @@
           <a:p>
             <a:fld id="{851C1364-0D93-CF4B-91C1-DFD523C3DABF}" type="datetimeFigureOut">
               <a:rPr lang="en-US" smtClean="0"/>
-              <a:t>8/19/25</a:t>
+              <a:t>8/22/25</a:t>
             </a:fld>
             <a:endParaRPr lang="en-US"/>
           </a:p>
@@ -2375,7 +2383,7 @@
           <a:p>
             <a:fld id="{851C1364-0D93-CF4B-91C1-DFD523C3DABF}" type="datetimeFigureOut">
               <a:rPr lang="en-US" smtClean="0"/>
-              <a:t>8/19/25</a:t>
+              <a:t>8/22/25</a:t>
             </a:fld>
             <a:endParaRPr lang="en-US"/>
           </a:p>
@@ -2663,7 +2671,7 @@
           <a:p>
             <a:fld id="{851C1364-0D93-CF4B-91C1-DFD523C3DABF}" type="datetimeFigureOut">
               <a:rPr lang="en-US" smtClean="0"/>
-              <a:t>8/19/25</a:t>
+              <a:t>8/22/25</a:t>
             </a:fld>
             <a:endParaRPr lang="en-US"/>
           </a:p>
@@ -2904,7 +2912,7 @@
           <a:p>
             <a:fld id="{851C1364-0D93-CF4B-91C1-DFD523C3DABF}" type="datetimeFigureOut">
               <a:rPr lang="en-US" smtClean="0"/>
-              <a:t>8/19/25</a:t>
+              <a:t>8/22/25</a:t>
             </a:fld>
             <a:endParaRPr lang="en-US"/>
           </a:p>
@@ -3364,6 +3372,1245 @@
 </p:sld>
 </file>
 
+<file path=ppt/slides/slide2.xml><?xml version="1.0" encoding="utf-8"?>
+<p:sld xmlns:a="http://schemas.openxmlformats.org/drawingml/2006/main" xmlns:r="http://schemas.openxmlformats.org/officeDocument/2006/relationships" xmlns:p="http://schemas.openxmlformats.org/presentationml/2006/main">
+  <p:cSld>
+    <p:spTree>
+      <p:nvGrpSpPr>
+        <p:cNvPr id="1" name=""/>
+        <p:cNvGrpSpPr/>
+        <p:nvPr/>
+      </p:nvGrpSpPr>
+      <p:grpSpPr>
+        <a:xfrm>
+          <a:off x="0" y="0"/>
+          <a:ext cx="0" cy="0"/>
+          <a:chOff x="0" y="0"/>
+          <a:chExt cx="0" cy="0"/>
+        </a:xfrm>
+      </p:grpSpPr>
+      <p:grpSp>
+        <p:nvGrpSpPr>
+          <p:cNvPr id="17" name="Group 16">
+            <a:extLst>
+              <a:ext uri="{FF2B5EF4-FFF2-40B4-BE49-F238E27FC236}">
+                <a16:creationId xmlns:a16="http://schemas.microsoft.com/office/drawing/2014/main" id="{F375CD9D-B8C3-B44F-8F45-53E4F60FAA99}"/>
+              </a:ext>
+            </a:extLst>
+          </p:cNvPr>
+          <p:cNvGrpSpPr/>
+          <p:nvPr/>
+        </p:nvGrpSpPr>
+        <p:grpSpPr>
+          <a:xfrm>
+            <a:off x="898136" y="367553"/>
+            <a:ext cx="8859458" cy="6330099"/>
+            <a:chOff x="898136" y="367553"/>
+            <a:chExt cx="8859458" cy="6330099"/>
+          </a:xfrm>
+        </p:grpSpPr>
+        <p:grpSp>
+          <p:nvGrpSpPr>
+            <p:cNvPr id="16" name="Group 15">
+              <a:extLst>
+                <a:ext uri="{FF2B5EF4-FFF2-40B4-BE49-F238E27FC236}">
+                  <a16:creationId xmlns:a16="http://schemas.microsoft.com/office/drawing/2014/main" id="{0102D9FB-A79E-F102-F0E9-08C4BE0EC70A}"/>
+                </a:ext>
+              </a:extLst>
+            </p:cNvPr>
+            <p:cNvGrpSpPr/>
+            <p:nvPr/>
+          </p:nvGrpSpPr>
+          <p:grpSpPr>
+            <a:xfrm>
+              <a:off x="898136" y="367553"/>
+              <a:ext cx="8772338" cy="6323106"/>
+              <a:chOff x="898136" y="367553"/>
+              <a:chExt cx="8772338" cy="6323106"/>
+            </a:xfrm>
+          </p:grpSpPr>
+          <p:pic>
+            <p:nvPicPr>
+              <p:cNvPr id="4" name="Picture 3">
+                <a:extLst>
+                  <a:ext uri="{FF2B5EF4-FFF2-40B4-BE49-F238E27FC236}">
+                    <a16:creationId xmlns:a16="http://schemas.microsoft.com/office/drawing/2014/main" id="{48AACB06-424D-DAD1-298D-0DA5EEE9DC4C}"/>
+                  </a:ext>
+                </a:extLst>
+              </p:cNvPr>
+              <p:cNvPicPr>
+                <a:picLocks noChangeAspect="1"/>
+              </p:cNvPicPr>
+              <p:nvPr/>
+            </p:nvPicPr>
+            <p:blipFill>
+              <a:blip r:embed="rId2"/>
+              <a:srcRect r="31414"/>
+              <a:stretch>
+                <a:fillRect/>
+              </a:stretch>
+            </p:blipFill>
+            <p:spPr>
+              <a:xfrm>
+                <a:off x="1353670" y="367553"/>
+                <a:ext cx="6505227" cy="6323106"/>
+              </a:xfrm>
+              <a:prstGeom prst="rect">
+                <a:avLst/>
+              </a:prstGeom>
+            </p:spPr>
+          </p:pic>
+          <p:sp>
+            <p:nvSpPr>
+              <p:cNvPr id="5" name="TextBox 4">
+                <a:extLst>
+                  <a:ext uri="{FF2B5EF4-FFF2-40B4-BE49-F238E27FC236}">
+                    <a16:creationId xmlns:a16="http://schemas.microsoft.com/office/drawing/2014/main" id="{1C9E1E83-709C-002E-3AB2-86C067674F32}"/>
+                  </a:ext>
+                </a:extLst>
+              </p:cNvPr>
+              <p:cNvSpPr txBox="1"/>
+              <p:nvPr/>
+            </p:nvSpPr>
+            <p:spPr>
+              <a:xfrm>
+                <a:off x="898136" y="2605776"/>
+                <a:ext cx="2533680" cy="923330"/>
+              </a:xfrm>
+              <a:prstGeom prst="rect">
+                <a:avLst/>
+              </a:prstGeom>
+              <a:noFill/>
+            </p:spPr>
+            <p:txBody>
+              <a:bodyPr wrap="square" rtlCol="0">
+                <a:spAutoFit/>
+              </a:bodyPr>
+              <a:lstStyle/>
+              <a:p>
+                <a:pPr algn="r"/>
+                <a:r>
+                  <a:rPr lang="en-CA" sz="900" b="1" dirty="0">
+                    <a:latin typeface="Corbel" panose="020B0503020204020204" pitchFamily="34" charset="0"/>
+                  </a:rPr>
+                  <a:t>LAB families (</a:t>
+                </a:r>
+                <a:r>
+                  <a:rPr lang="en-CA" sz="900" b="1" dirty="0" err="1">
+                    <a:latin typeface="Corbel" panose="020B0503020204020204" pitchFamily="34" charset="0"/>
+                  </a:rPr>
+                  <a:t>Lactobacillaceae</a:t>
+                </a:r>
+                <a:r>
+                  <a:rPr lang="en-CA" sz="900" b="1" dirty="0">
+                    <a:latin typeface="Corbel" panose="020B0503020204020204" pitchFamily="34" charset="0"/>
+                  </a:rPr>
+                  <a:t>, </a:t>
+                </a:r>
+                <a:r>
+                  <a:rPr lang="en-CA" sz="900" b="1" dirty="0" err="1">
+                    <a:latin typeface="Corbel" panose="020B0503020204020204" pitchFamily="34" charset="0"/>
+                  </a:rPr>
+                  <a:t>Leuconostocaceae</a:t>
+                </a:r>
+                <a:r>
+                  <a:rPr lang="en-CA" sz="900" b="1" dirty="0">
+                    <a:latin typeface="Corbel" panose="020B0503020204020204" pitchFamily="34" charset="0"/>
+                  </a:rPr>
+                  <a:t>, </a:t>
+                </a:r>
+                <a:r>
+                  <a:rPr lang="en-CA" sz="900" b="1" dirty="0" err="1">
+                    <a:latin typeface="Corbel" panose="020B0503020204020204" pitchFamily="34" charset="0"/>
+                  </a:rPr>
+                  <a:t>Streptococcaceae</a:t>
+                </a:r>
+                <a:r>
+                  <a:rPr lang="en-CA" sz="900" b="1" dirty="0">
+                    <a:latin typeface="Corbel" panose="020B0503020204020204" pitchFamily="34" charset="0"/>
+                  </a:rPr>
+                  <a:t>, </a:t>
+                </a:r>
+                <a:r>
+                  <a:rPr lang="en-CA" sz="900" b="1" dirty="0" err="1">
+                    <a:latin typeface="Corbel" panose="020B0503020204020204" pitchFamily="34" charset="0"/>
+                  </a:rPr>
+                  <a:t>Enterococcaceae</a:t>
+                </a:r>
+                <a:r>
+                  <a:rPr lang="en-CA" sz="900" b="1" dirty="0">
+                    <a:latin typeface="Corbel" panose="020B0503020204020204" pitchFamily="34" charset="0"/>
+                  </a:rPr>
+                  <a:t>, and </a:t>
+                </a:r>
+                <a:r>
+                  <a:rPr lang="en-CA" sz="900" b="1" dirty="0" err="1">
+                    <a:latin typeface="Corbel" panose="020B0503020204020204" pitchFamily="34" charset="0"/>
+                  </a:rPr>
+                  <a:t>Carnobacteriaceae</a:t>
+                </a:r>
+                <a:r>
+                  <a:rPr lang="en-CA" sz="900" b="1" dirty="0">
+                    <a:latin typeface="Corbel" panose="020B0503020204020204" pitchFamily="34" charset="0"/>
+                  </a:rPr>
+                  <a:t>)</a:t>
+                </a:r>
+                <a:r>
+                  <a:rPr lang="en-CA" sz="900" dirty="0">
+                    <a:latin typeface="Corbel" panose="020B0503020204020204" pitchFamily="34" charset="0"/>
+                  </a:rPr>
+                  <a:t> as the backbone of most </a:t>
+                </a:r>
+                <a:r>
+                  <a:rPr lang="en-CA" sz="900" b="1" dirty="0">
+                    <a:latin typeface="Corbel" panose="020B0503020204020204" pitchFamily="34" charset="0"/>
+                  </a:rPr>
+                  <a:t>dairy, cereal, and vegetable fermentations</a:t>
+                </a:r>
+                <a:r>
+                  <a:rPr lang="en-CA" sz="900" dirty="0">
+                    <a:latin typeface="Corbel" panose="020B0503020204020204" pitchFamily="34" charset="0"/>
+                  </a:rPr>
+                  <a:t>.</a:t>
+                </a:r>
+              </a:p>
+              <a:p>
+                <a:pPr algn="r"/>
+                <a:endParaRPr lang="en-US" sz="900" dirty="0">
+                  <a:solidFill>
+                    <a:schemeClr val="tx1">
+                      <a:lumMod val="50000"/>
+                      <a:lumOff val="50000"/>
+                    </a:schemeClr>
+                  </a:solidFill>
+                  <a:latin typeface="Corbel" panose="020B0503020204020204" pitchFamily="34" charset="0"/>
+                </a:endParaRPr>
+              </a:p>
+            </p:txBody>
+          </p:sp>
+          <p:pic>
+            <p:nvPicPr>
+              <p:cNvPr id="8" name="Picture 7">
+                <a:extLst>
+                  <a:ext uri="{FF2B5EF4-FFF2-40B4-BE49-F238E27FC236}">
+                    <a16:creationId xmlns:a16="http://schemas.microsoft.com/office/drawing/2014/main" id="{7EDBAB16-07C2-12FE-6BB6-9ED3A87D99F7}"/>
+                  </a:ext>
+                </a:extLst>
+              </p:cNvPr>
+              <p:cNvPicPr>
+                <a:picLocks noChangeAspect="1"/>
+              </p:cNvPicPr>
+              <p:nvPr/>
+            </p:nvPicPr>
+            <p:blipFill>
+              <a:blip r:embed="rId2"/>
+              <a:srcRect l="63098" t="71826" r="22879"/>
+              <a:stretch>
+                <a:fillRect/>
+              </a:stretch>
+            </p:blipFill>
+            <p:spPr>
+              <a:xfrm>
+                <a:off x="1353670" y="4803024"/>
+                <a:ext cx="1155708" cy="1548000"/>
+              </a:xfrm>
+              <a:prstGeom prst="rect">
+                <a:avLst/>
+              </a:prstGeom>
+            </p:spPr>
+          </p:pic>
+          <p:sp>
+            <p:nvSpPr>
+              <p:cNvPr id="10" name="TextBox 9">
+                <a:extLst>
+                  <a:ext uri="{FF2B5EF4-FFF2-40B4-BE49-F238E27FC236}">
+                    <a16:creationId xmlns:a16="http://schemas.microsoft.com/office/drawing/2014/main" id="{191BBC19-B19F-5A21-5DB3-E39CB510926C}"/>
+                  </a:ext>
+                </a:extLst>
+              </p:cNvPr>
+              <p:cNvSpPr txBox="1"/>
+              <p:nvPr/>
+            </p:nvSpPr>
+            <p:spPr>
+              <a:xfrm>
+                <a:off x="7389090" y="2921169"/>
+                <a:ext cx="1985819" cy="646331"/>
+              </a:xfrm>
+              <a:prstGeom prst="rect">
+                <a:avLst/>
+              </a:prstGeom>
+              <a:noFill/>
+            </p:spPr>
+            <p:txBody>
+              <a:bodyPr wrap="square">
+                <a:spAutoFit/>
+              </a:bodyPr>
+              <a:lstStyle/>
+              <a:p>
+                <a:pPr>
+                  <a:buNone/>
+                </a:pPr>
+                <a:r>
+                  <a:rPr lang="en-CA" sz="900" b="1" dirty="0">
+                    <a:latin typeface="Corbel" panose="020B0503020204020204" pitchFamily="34" charset="0"/>
+                  </a:rPr>
+                  <a:t>Surface-ripening and meat fermentations involve </a:t>
+                </a:r>
+                <a:r>
+                  <a:rPr lang="en-CA" sz="900" b="1" dirty="0" err="1">
+                    <a:latin typeface="Corbel" panose="020B0503020204020204" pitchFamily="34" charset="0"/>
+                  </a:rPr>
+                  <a:t>Staphylococcaceae</a:t>
+                </a:r>
+                <a:r>
+                  <a:rPr lang="en-CA" sz="900" b="1" dirty="0">
+                    <a:latin typeface="Corbel" panose="020B0503020204020204" pitchFamily="34" charset="0"/>
+                  </a:rPr>
+                  <a:t>, </a:t>
+                </a:r>
+                <a:r>
+                  <a:rPr lang="en-CA" sz="900" b="1" dirty="0" err="1">
+                    <a:latin typeface="Corbel" panose="020B0503020204020204" pitchFamily="34" charset="0"/>
+                  </a:rPr>
+                  <a:t>Micrococcaceae</a:t>
+                </a:r>
+                <a:r>
+                  <a:rPr lang="en-CA" sz="900" b="1" dirty="0">
+                    <a:latin typeface="Corbel" panose="020B0503020204020204" pitchFamily="34" charset="0"/>
+                  </a:rPr>
+                  <a:t>, </a:t>
+                </a:r>
+                <a:r>
+                  <a:rPr lang="en-CA" sz="900" b="1" dirty="0" err="1">
+                    <a:latin typeface="Corbel" panose="020B0503020204020204" pitchFamily="34" charset="0"/>
+                  </a:rPr>
+                  <a:t>Brevibacteriaceae</a:t>
+                </a:r>
+                <a:r>
+                  <a:rPr lang="en-CA" sz="900" b="1" dirty="0">
+                    <a:latin typeface="Corbel" panose="020B0503020204020204" pitchFamily="34" charset="0"/>
+                  </a:rPr>
+                  <a:t>.</a:t>
+                </a:r>
+              </a:p>
+            </p:txBody>
+          </p:sp>
+          <p:sp>
+            <p:nvSpPr>
+              <p:cNvPr id="12" name="TextBox 11">
+                <a:extLst>
+                  <a:ext uri="{FF2B5EF4-FFF2-40B4-BE49-F238E27FC236}">
+                    <a16:creationId xmlns:a16="http://schemas.microsoft.com/office/drawing/2014/main" id="{8A59A16E-6FE1-668F-A9E7-4242F8B871EE}"/>
+                  </a:ext>
+                </a:extLst>
+              </p:cNvPr>
+              <p:cNvSpPr txBox="1"/>
+              <p:nvPr/>
+            </p:nvSpPr>
+            <p:spPr>
+              <a:xfrm>
+                <a:off x="2667000" y="4064186"/>
+                <a:ext cx="2308861" cy="646331"/>
+              </a:xfrm>
+              <a:prstGeom prst="rect">
+                <a:avLst/>
+              </a:prstGeom>
+              <a:noFill/>
+            </p:spPr>
+            <p:txBody>
+              <a:bodyPr wrap="square">
+                <a:spAutoFit/>
+              </a:bodyPr>
+              <a:lstStyle/>
+              <a:p>
+                <a:pPr algn="r">
+                  <a:buNone/>
+                </a:pPr>
+                <a:r>
+                  <a:rPr lang="en-CA" sz="900" b="1" dirty="0">
+                    <a:latin typeface="Corbel" panose="020B0503020204020204" pitchFamily="34" charset="0"/>
+                  </a:rPr>
+                  <a:t>Plant-associated Enterobacteriaceae and </a:t>
+                </a:r>
+                <a:r>
+                  <a:rPr lang="en-CA" sz="900" b="1" dirty="0" err="1">
+                    <a:latin typeface="Corbel" panose="020B0503020204020204" pitchFamily="34" charset="0"/>
+                  </a:rPr>
+                  <a:t>Erwiniaceae</a:t>
+                </a:r>
+                <a:r>
+                  <a:rPr lang="en-CA" sz="900" b="1" dirty="0">
+                    <a:latin typeface="Corbel" panose="020B0503020204020204" pitchFamily="34" charset="0"/>
+                  </a:rPr>
+                  <a:t> initializes fermentation in vegetables, cereal, tubers, coffee and cocoa</a:t>
+                </a:r>
+              </a:p>
+            </p:txBody>
+          </p:sp>
+          <p:sp>
+            <p:nvSpPr>
+              <p:cNvPr id="14" name="TextBox 13">
+                <a:extLst>
+                  <a:ext uri="{FF2B5EF4-FFF2-40B4-BE49-F238E27FC236}">
+                    <a16:creationId xmlns:a16="http://schemas.microsoft.com/office/drawing/2014/main" id="{8A1A7DCB-9AD7-C1FD-EE85-097D879DA10B}"/>
+                  </a:ext>
+                </a:extLst>
+              </p:cNvPr>
+              <p:cNvSpPr txBox="1"/>
+              <p:nvPr/>
+            </p:nvSpPr>
+            <p:spPr>
+              <a:xfrm>
+                <a:off x="7730588" y="1031717"/>
+                <a:ext cx="1939886" cy="646331"/>
+              </a:xfrm>
+              <a:prstGeom prst="rect">
+                <a:avLst/>
+              </a:prstGeom>
+              <a:noFill/>
+            </p:spPr>
+            <p:txBody>
+              <a:bodyPr wrap="square">
+                <a:spAutoFit/>
+              </a:bodyPr>
+              <a:lstStyle/>
+              <a:p>
+                <a:r>
+                  <a:rPr lang="en-CA" sz="900" b="1" dirty="0" err="1">
+                    <a:latin typeface="Corbel" panose="020B0503020204020204" pitchFamily="34" charset="0"/>
+                  </a:rPr>
+                  <a:t>Eggerthellaceae</a:t>
+                </a:r>
+                <a:r>
+                  <a:rPr lang="en-CA" sz="900" b="1" dirty="0">
+                    <a:latin typeface="Corbel" panose="020B0503020204020204" pitchFamily="34" charset="0"/>
+                  </a:rPr>
+                  <a:t> plays a minor yet emerging role in vegetable fermentation (</a:t>
+                </a:r>
+                <a:r>
+                  <a:rPr lang="en-CA" sz="900" b="1" dirty="0" err="1">
+                    <a:latin typeface="Corbel" panose="020B0503020204020204" pitchFamily="34" charset="0"/>
+                  </a:rPr>
+                  <a:t>eg.</a:t>
+                </a:r>
+                <a:r>
+                  <a:rPr lang="en-CA" sz="900" b="1" dirty="0">
+                    <a:latin typeface="Corbel" panose="020B0503020204020204" pitchFamily="34" charset="0"/>
+                  </a:rPr>
+                  <a:t> Sauerkraut and kimchi).</a:t>
+                </a:r>
+              </a:p>
+            </p:txBody>
+          </p:sp>
+        </p:grpSp>
+        <p:sp>
+          <p:nvSpPr>
+            <p:cNvPr id="7" name="TextBox 6">
+              <a:extLst>
+                <a:ext uri="{FF2B5EF4-FFF2-40B4-BE49-F238E27FC236}">
+                  <a16:creationId xmlns:a16="http://schemas.microsoft.com/office/drawing/2014/main" id="{47FB526F-6124-91EC-17DA-390E7E68BCA2}"/>
+                </a:ext>
+              </a:extLst>
+            </p:cNvPr>
+            <p:cNvSpPr txBox="1"/>
+            <p:nvPr/>
+          </p:nvSpPr>
+          <p:spPr>
+            <a:xfrm>
+              <a:off x="7476212" y="4954913"/>
+              <a:ext cx="2281382" cy="1742739"/>
+            </a:xfrm>
+            <a:prstGeom prst="rect">
+              <a:avLst/>
+            </a:prstGeom>
+            <a:solidFill>
+              <a:schemeClr val="bg1"/>
+            </a:solidFill>
+          </p:spPr>
+          <p:txBody>
+            <a:bodyPr wrap="square" anchor="ctr">
+              <a:noAutofit/>
+            </a:bodyPr>
+            <a:lstStyle/>
+            <a:p>
+              <a:pPr>
+                <a:buNone/>
+              </a:pPr>
+              <a:r>
+                <a:rPr lang="en-CA" sz="900" b="1" dirty="0">
+                  <a:latin typeface="Corbel" panose="020B0503020204020204" pitchFamily="34" charset="0"/>
+                </a:rPr>
+                <a:t>Acetobacteraceae, </a:t>
+              </a:r>
+              <a:r>
+                <a:rPr lang="en-CA" sz="900" b="1" dirty="0" err="1">
+                  <a:latin typeface="Corbel" panose="020B0503020204020204" pitchFamily="34" charset="0"/>
+                </a:rPr>
+                <a:t>Bacillaceae</a:t>
+              </a:r>
+              <a:r>
+                <a:rPr lang="en-CA" sz="900" b="1" dirty="0">
+                  <a:latin typeface="Corbel" panose="020B0503020204020204" pitchFamily="34" charset="0"/>
+                </a:rPr>
+                <a:t>, and </a:t>
+              </a:r>
+              <a:r>
+                <a:rPr lang="en-CA" sz="900" b="1" dirty="0" err="1">
+                  <a:latin typeface="Corbel" panose="020B0503020204020204" pitchFamily="34" charset="0"/>
+                </a:rPr>
+                <a:t>Propionibacteriaceae</a:t>
+              </a:r>
+              <a:r>
+                <a:rPr lang="en-CA" sz="900" b="1" dirty="0">
+                  <a:latin typeface="Corbel" panose="020B0503020204020204" pitchFamily="34" charset="0"/>
+                </a:rPr>
+                <a:t> define specific niches such as vinegar, natto, soy/fish sauces, and Swiss cheeses. </a:t>
+              </a:r>
+            </a:p>
+          </p:txBody>
+        </p:sp>
+      </p:grpSp>
+    </p:spTree>
+    <p:extLst>
+      <p:ext uri="{BB962C8B-B14F-4D97-AF65-F5344CB8AC3E}">
+        <p14:creationId xmlns:p14="http://schemas.microsoft.com/office/powerpoint/2010/main" val="926140094"/>
+      </p:ext>
+    </p:extLst>
+  </p:cSld>
+  <p:clrMapOvr>
+    <a:masterClrMapping/>
+  </p:clrMapOvr>
+</p:sld>
+</file>
+
+<file path=ppt/slides/slide3.xml><?xml version="1.0" encoding="utf-8"?>
+<p:sld xmlns:a="http://schemas.openxmlformats.org/drawingml/2006/main" xmlns:r="http://schemas.openxmlformats.org/officeDocument/2006/relationships" xmlns:p="http://schemas.openxmlformats.org/presentationml/2006/main">
+  <p:cSld>
+    <p:spTree>
+      <p:nvGrpSpPr>
+        <p:cNvPr id="1" name="">
+          <a:extLst>
+            <a:ext uri="{FF2B5EF4-FFF2-40B4-BE49-F238E27FC236}">
+              <a16:creationId xmlns:a16="http://schemas.microsoft.com/office/drawing/2014/main" id="{F882C6D0-2394-F602-3098-36B5D0DB02B1}"/>
+            </a:ext>
+          </a:extLst>
+        </p:cNvPr>
+        <p:cNvGrpSpPr/>
+        <p:nvPr/>
+      </p:nvGrpSpPr>
+      <p:grpSpPr>
+        <a:xfrm>
+          <a:off x="0" y="0"/>
+          <a:ext cx="0" cy="0"/>
+          <a:chOff x="0" y="0"/>
+          <a:chExt cx="0" cy="0"/>
+        </a:xfrm>
+      </p:grpSpPr>
+      <p:grpSp>
+        <p:nvGrpSpPr>
+          <p:cNvPr id="16" name="Group 15">
+            <a:extLst>
+              <a:ext uri="{FF2B5EF4-FFF2-40B4-BE49-F238E27FC236}">
+                <a16:creationId xmlns:a16="http://schemas.microsoft.com/office/drawing/2014/main" id="{B7E7AAEF-F6CB-93B2-9978-871ADAE3268D}"/>
+              </a:ext>
+            </a:extLst>
+          </p:cNvPr>
+          <p:cNvGrpSpPr/>
+          <p:nvPr/>
+        </p:nvGrpSpPr>
+        <p:grpSpPr>
+          <a:xfrm>
+            <a:off x="1353670" y="367553"/>
+            <a:ext cx="6505227" cy="6323106"/>
+            <a:chOff x="1353670" y="367553"/>
+            <a:chExt cx="6505227" cy="6323106"/>
+          </a:xfrm>
+        </p:grpSpPr>
+        <p:pic>
+          <p:nvPicPr>
+            <p:cNvPr id="4" name="Picture 3">
+              <a:extLst>
+                <a:ext uri="{FF2B5EF4-FFF2-40B4-BE49-F238E27FC236}">
+                  <a16:creationId xmlns:a16="http://schemas.microsoft.com/office/drawing/2014/main" id="{EBD5F8B8-4604-3ACA-51DD-EBA74D17C7FA}"/>
+                </a:ext>
+              </a:extLst>
+            </p:cNvPr>
+            <p:cNvPicPr>
+              <a:picLocks noChangeAspect="1"/>
+            </p:cNvPicPr>
+            <p:nvPr/>
+          </p:nvPicPr>
+          <p:blipFill>
+            <a:blip r:embed="rId2"/>
+            <a:srcRect r="31414"/>
+            <a:stretch>
+              <a:fillRect/>
+            </a:stretch>
+          </p:blipFill>
+          <p:spPr>
+            <a:xfrm>
+              <a:off x="1353670" y="367553"/>
+              <a:ext cx="6505227" cy="6323106"/>
+            </a:xfrm>
+            <a:prstGeom prst="rect">
+              <a:avLst/>
+            </a:prstGeom>
+          </p:spPr>
+        </p:pic>
+        <p:pic>
+          <p:nvPicPr>
+            <p:cNvPr id="8" name="Picture 7">
+              <a:extLst>
+                <a:ext uri="{FF2B5EF4-FFF2-40B4-BE49-F238E27FC236}">
+                  <a16:creationId xmlns:a16="http://schemas.microsoft.com/office/drawing/2014/main" id="{5E51BDC5-151E-39C0-C975-CF6133D3209F}"/>
+                </a:ext>
+              </a:extLst>
+            </p:cNvPr>
+            <p:cNvPicPr>
+              <a:picLocks noChangeAspect="1"/>
+            </p:cNvPicPr>
+            <p:nvPr/>
+          </p:nvPicPr>
+          <p:blipFill>
+            <a:blip r:embed="rId2"/>
+            <a:srcRect l="63098" t="71826" r="22879"/>
+            <a:stretch>
+              <a:fillRect/>
+            </a:stretch>
+          </p:blipFill>
+          <p:spPr>
+            <a:xfrm>
+              <a:off x="1353670" y="4803024"/>
+              <a:ext cx="1155708" cy="1548000"/>
+            </a:xfrm>
+            <a:prstGeom prst="rect">
+              <a:avLst/>
+            </a:prstGeom>
+          </p:spPr>
+        </p:pic>
+      </p:grpSp>
+      <p:sp>
+        <p:nvSpPr>
+          <p:cNvPr id="2" name="Oval 1">
+            <a:extLst>
+              <a:ext uri="{FF2B5EF4-FFF2-40B4-BE49-F238E27FC236}">
+                <a16:creationId xmlns:a16="http://schemas.microsoft.com/office/drawing/2014/main" id="{8B4A0050-0D5D-F8FC-6B78-BACCC1AF19CD}"/>
+              </a:ext>
+            </a:extLst>
+          </p:cNvPr>
+          <p:cNvSpPr/>
+          <p:nvPr/>
+        </p:nvSpPr>
+        <p:spPr>
+          <a:xfrm>
+            <a:off x="1470212" y="860612"/>
+            <a:ext cx="914400" cy="914400"/>
+          </a:xfrm>
+          <a:prstGeom prst="ellipse">
+            <a:avLst/>
+          </a:prstGeom>
+          <a:solidFill>
+            <a:srgbClr val="00B050"/>
+          </a:solidFill>
+          <a:ln>
+            <a:noFill/>
+          </a:ln>
+        </p:spPr>
+        <p:style>
+          <a:lnRef idx="2">
+            <a:schemeClr val="accent1">
+              <a:shade val="15000"/>
+            </a:schemeClr>
+          </a:lnRef>
+          <a:fillRef idx="1">
+            <a:schemeClr val="accent1"/>
+          </a:fillRef>
+          <a:effectRef idx="0">
+            <a:schemeClr val="accent1"/>
+          </a:effectRef>
+          <a:fontRef idx="minor">
+            <a:schemeClr val="lt1"/>
+          </a:fontRef>
+        </p:style>
+        <p:txBody>
+          <a:bodyPr rtlCol="0" anchor="ctr"/>
+          <a:lstStyle/>
+          <a:p>
+            <a:pPr algn="ctr"/>
+            <a:endParaRPr lang="en-US" dirty="0"/>
+          </a:p>
+        </p:txBody>
+      </p:sp>
+      <p:sp>
+        <p:nvSpPr>
+          <p:cNvPr id="3" name="Oval 2">
+            <a:extLst>
+              <a:ext uri="{FF2B5EF4-FFF2-40B4-BE49-F238E27FC236}">
+                <a16:creationId xmlns:a16="http://schemas.microsoft.com/office/drawing/2014/main" id="{36652D72-CC3D-4D0E-0D3E-5D92B4AA10C8}"/>
+              </a:ext>
+            </a:extLst>
+          </p:cNvPr>
+          <p:cNvSpPr/>
+          <p:nvPr/>
+        </p:nvSpPr>
+        <p:spPr>
+          <a:xfrm>
+            <a:off x="1470212" y="1917418"/>
+            <a:ext cx="914400" cy="914400"/>
+          </a:xfrm>
+          <a:prstGeom prst="ellipse">
+            <a:avLst/>
+          </a:prstGeom>
+          <a:solidFill>
+            <a:schemeClr val="accent2">
+              <a:lumMod val="60000"/>
+              <a:lumOff val="40000"/>
+            </a:schemeClr>
+          </a:solidFill>
+          <a:ln>
+            <a:noFill/>
+          </a:ln>
+        </p:spPr>
+        <p:style>
+          <a:lnRef idx="2">
+            <a:schemeClr val="accent1">
+              <a:shade val="15000"/>
+            </a:schemeClr>
+          </a:lnRef>
+          <a:fillRef idx="1">
+            <a:schemeClr val="accent1"/>
+          </a:fillRef>
+          <a:effectRef idx="0">
+            <a:schemeClr val="accent1"/>
+          </a:effectRef>
+          <a:fontRef idx="minor">
+            <a:schemeClr val="lt1"/>
+          </a:fontRef>
+        </p:style>
+        <p:txBody>
+          <a:bodyPr rtlCol="0" anchor="ctr"/>
+          <a:lstStyle/>
+          <a:p>
+            <a:pPr algn="ctr"/>
+            <a:endParaRPr lang="en-US" dirty="0"/>
+          </a:p>
+        </p:txBody>
+      </p:sp>
+    </p:spTree>
+    <p:extLst>
+      <p:ext uri="{BB962C8B-B14F-4D97-AF65-F5344CB8AC3E}">
+        <p14:creationId xmlns:p14="http://schemas.microsoft.com/office/powerpoint/2010/main" val="2420408623"/>
+      </p:ext>
+    </p:extLst>
+  </p:cSld>
+  <p:clrMapOvr>
+    <a:masterClrMapping/>
+  </p:clrMapOvr>
+</p:sld>
+</file>
+
+<file path=ppt/slides/slide4.xml><?xml version="1.0" encoding="utf-8"?>
+<p:sld xmlns:a="http://schemas.openxmlformats.org/drawingml/2006/main" xmlns:r="http://schemas.openxmlformats.org/officeDocument/2006/relationships" xmlns:p="http://schemas.openxmlformats.org/presentationml/2006/main">
+  <p:cSld>
+    <p:spTree>
+      <p:nvGrpSpPr>
+        <p:cNvPr id="1" name=""/>
+        <p:cNvGrpSpPr/>
+        <p:nvPr/>
+      </p:nvGrpSpPr>
+      <p:grpSpPr>
+        <a:xfrm>
+          <a:off x="0" y="0"/>
+          <a:ext cx="0" cy="0"/>
+          <a:chOff x="0" y="0"/>
+          <a:chExt cx="0" cy="0"/>
+        </a:xfrm>
+      </p:grpSpPr>
+      <p:sp>
+        <p:nvSpPr>
+          <p:cNvPr id="2" name="Title 1">
+            <a:extLst>
+              <a:ext uri="{FF2B5EF4-FFF2-40B4-BE49-F238E27FC236}">
+                <a16:creationId xmlns:a16="http://schemas.microsoft.com/office/drawing/2014/main" id="{8BDC8F39-BF8F-D31C-35E9-DA17BC44850C}"/>
+              </a:ext>
+            </a:extLst>
+          </p:cNvPr>
+          <p:cNvSpPr>
+            <a:spLocks noGrp="1"/>
+          </p:cNvSpPr>
+          <p:nvPr>
+            <p:ph type="title"/>
+          </p:nvPr>
+        </p:nvSpPr>
+        <p:spPr>
+          <a:xfrm>
+            <a:off x="838200" y="351420"/>
+            <a:ext cx="10515600" cy="518795"/>
+          </a:xfrm>
+        </p:spPr>
+        <p:txBody>
+          <a:bodyPr>
+            <a:noAutofit/>
+          </a:bodyPr>
+          <a:lstStyle/>
+          <a:p>
+            <a:r>
+              <a:rPr lang="en-US" sz="2400" dirty="0">
+                <a:latin typeface="Corbel" panose="020B0503020204020204" pitchFamily="34" charset="0"/>
+              </a:rPr>
+              <a:t>Key bacteria families driving food fermentation</a:t>
+            </a:r>
+          </a:p>
+        </p:txBody>
+      </p:sp>
+      <p:sp>
+        <p:nvSpPr>
+          <p:cNvPr id="4" name="Title 1">
+            <a:extLst>
+              <a:ext uri="{FF2B5EF4-FFF2-40B4-BE49-F238E27FC236}">
+                <a16:creationId xmlns:a16="http://schemas.microsoft.com/office/drawing/2014/main" id="{AEF1E5D8-C832-2369-2675-D3B4A522F23F}"/>
+              </a:ext>
+            </a:extLst>
+          </p:cNvPr>
+          <p:cNvSpPr txBox="1">
+            <a:spLocks/>
+          </p:cNvSpPr>
+          <p:nvPr/>
+        </p:nvSpPr>
+        <p:spPr>
+          <a:xfrm>
+            <a:off x="838200" y="791849"/>
+            <a:ext cx="10515600" cy="518795"/>
+          </a:xfrm>
+          <a:prstGeom prst="rect">
+            <a:avLst/>
+          </a:prstGeom>
+        </p:spPr>
+        <p:txBody>
+          <a:bodyPr vert="horz" lIns="91440" tIns="45720" rIns="91440" bIns="45720" rtlCol="0" anchor="ctr">
+            <a:normAutofit fontScale="97500"/>
+          </a:bodyPr>
+          <a:lstStyle>
+            <a:lvl1pPr algn="l" defTabSz="914400" rtl="0" eaLnBrk="1" latinLnBrk="0" hangingPunct="1">
+              <a:lnSpc>
+                <a:spcPct val="90000"/>
+              </a:lnSpc>
+              <a:spcBef>
+                <a:spcPct val="0"/>
+              </a:spcBef>
+              <a:buNone/>
+              <a:defRPr sz="4400" kern="1200">
+                <a:solidFill>
+                  <a:schemeClr val="tx1"/>
+                </a:solidFill>
+                <a:latin typeface="+mj-lt"/>
+                <a:ea typeface="+mj-ea"/>
+                <a:cs typeface="+mj-cs"/>
+              </a:defRPr>
+            </a:lvl1pPr>
+          </a:lstStyle>
+          <a:p>
+            <a:r>
+              <a:rPr lang="en-US" sz="1400" dirty="0">
+                <a:latin typeface="Corbel" panose="020B0503020204020204" pitchFamily="34" charset="0"/>
+              </a:rPr>
+              <a:t>LAB families dominate dairy, cereal and vegetable fermentation, while </a:t>
+            </a:r>
+            <a:r>
+              <a:rPr lang="en-US" sz="1400" dirty="0" err="1">
+                <a:latin typeface="Corbel" panose="020B0503020204020204" pitchFamily="34" charset="0"/>
+              </a:rPr>
+              <a:t>Bacillaceae</a:t>
+            </a:r>
+            <a:r>
+              <a:rPr lang="en-US" sz="1400" dirty="0">
+                <a:latin typeface="Corbel" panose="020B0503020204020204" pitchFamily="34" charset="0"/>
+              </a:rPr>
+              <a:t> and Acetobacteraceae define niche processes</a:t>
+            </a:r>
+          </a:p>
+        </p:txBody>
+      </p:sp>
+      <p:pic>
+        <p:nvPicPr>
+          <p:cNvPr id="16" name="Picture 15">
+            <a:extLst>
+              <a:ext uri="{FF2B5EF4-FFF2-40B4-BE49-F238E27FC236}">
+                <a16:creationId xmlns:a16="http://schemas.microsoft.com/office/drawing/2014/main" id="{7A0BDBC6-42BB-2372-900F-9529829F48F7}"/>
+              </a:ext>
+            </a:extLst>
+          </p:cNvPr>
+          <p:cNvPicPr>
+            <a:picLocks noChangeAspect="1"/>
+          </p:cNvPicPr>
+          <p:nvPr/>
+        </p:nvPicPr>
+        <p:blipFill>
+          <a:blip r:embed="rId2"/>
+          <a:srcRect r="17643"/>
+          <a:stretch>
+            <a:fillRect/>
+          </a:stretch>
+        </p:blipFill>
+        <p:spPr>
+          <a:xfrm>
+            <a:off x="3515358" y="1782000"/>
+            <a:ext cx="7838442" cy="5076000"/>
+          </a:xfrm>
+          <a:prstGeom prst="rect">
+            <a:avLst/>
+          </a:prstGeom>
+        </p:spPr>
+      </p:pic>
+      <p:sp>
+        <p:nvSpPr>
+          <p:cNvPr id="18" name="TextBox 17">
+            <a:extLst>
+              <a:ext uri="{FF2B5EF4-FFF2-40B4-BE49-F238E27FC236}">
+                <a16:creationId xmlns:a16="http://schemas.microsoft.com/office/drawing/2014/main" id="{FBA3965B-7D69-7589-EB7C-240406B9746A}"/>
+              </a:ext>
+            </a:extLst>
+          </p:cNvPr>
+          <p:cNvSpPr txBox="1"/>
+          <p:nvPr/>
+        </p:nvSpPr>
+        <p:spPr>
+          <a:xfrm>
+            <a:off x="943303" y="1603928"/>
+            <a:ext cx="6077607" cy="2339102"/>
+          </a:xfrm>
+          <a:prstGeom prst="rect">
+            <a:avLst/>
+          </a:prstGeom>
+          <a:noFill/>
+          <a:ln>
+            <a:solidFill>
+              <a:srgbClr val="7030A0"/>
+            </a:solidFill>
+          </a:ln>
+        </p:spPr>
+        <p:txBody>
+          <a:bodyPr wrap="square">
+            <a:spAutoFit/>
+          </a:bodyPr>
+          <a:lstStyle/>
+          <a:p>
+            <a:pPr>
+              <a:buNone/>
+            </a:pPr>
+            <a:r>
+              <a:rPr lang="en-CA" sz="1050" b="1" dirty="0">
+                <a:latin typeface="Corbel" panose="020B0503020204020204" pitchFamily="34" charset="0"/>
+              </a:rPr>
+              <a:t>Key Insights</a:t>
+            </a:r>
+          </a:p>
+          <a:p>
+            <a:pPr>
+              <a:buNone/>
+            </a:pPr>
+            <a:endParaRPr lang="en-CA" sz="1050" dirty="0">
+              <a:latin typeface="Corbel" panose="020B0503020204020204" pitchFamily="34" charset="0"/>
+            </a:endParaRPr>
+          </a:p>
+          <a:p>
+            <a:pPr marL="171450" indent="-171450">
+              <a:spcAft>
+                <a:spcPts val="600"/>
+              </a:spcAft>
+              <a:buFont typeface="Arial" panose="020B0604020202020204" pitchFamily="34" charset="0"/>
+              <a:buChar char="•"/>
+            </a:pPr>
+            <a:r>
+              <a:rPr lang="en-CA" sz="1050" b="1" dirty="0">
+                <a:latin typeface="Corbel" panose="020B0503020204020204" pitchFamily="34" charset="0"/>
+              </a:rPr>
+              <a:t>Core Fermenters: </a:t>
+            </a:r>
+            <a:r>
+              <a:rPr lang="en-CA" sz="1050" dirty="0">
+                <a:latin typeface="Corbel" panose="020B0503020204020204" pitchFamily="34" charset="0"/>
+              </a:rPr>
+              <a:t>LAB families (</a:t>
+            </a:r>
+            <a:r>
+              <a:rPr lang="en-CA" sz="1050" dirty="0" err="1">
+                <a:latin typeface="Corbel" panose="020B0503020204020204" pitchFamily="34" charset="0"/>
+              </a:rPr>
+              <a:t>Lactobacillaceae</a:t>
+            </a:r>
+            <a:r>
+              <a:rPr lang="en-CA" sz="1050" dirty="0">
+                <a:latin typeface="Corbel" panose="020B0503020204020204" pitchFamily="34" charset="0"/>
+              </a:rPr>
+              <a:t>, </a:t>
+            </a:r>
+            <a:r>
+              <a:rPr lang="en-CA" sz="1050" dirty="0" err="1">
+                <a:latin typeface="Corbel" panose="020B0503020204020204" pitchFamily="34" charset="0"/>
+              </a:rPr>
+              <a:t>Leuconostocaceae</a:t>
+            </a:r>
+            <a:r>
+              <a:rPr lang="en-CA" sz="1050" dirty="0">
+                <a:latin typeface="Corbel" panose="020B0503020204020204" pitchFamily="34" charset="0"/>
+              </a:rPr>
+              <a:t>, </a:t>
+            </a:r>
+            <a:r>
+              <a:rPr lang="en-CA" sz="1050" dirty="0" err="1">
+                <a:latin typeface="Corbel" panose="020B0503020204020204" pitchFamily="34" charset="0"/>
+              </a:rPr>
+              <a:t>Streptococcaceae</a:t>
+            </a:r>
+            <a:r>
+              <a:rPr lang="en-CA" sz="1050" dirty="0">
+                <a:latin typeface="Corbel" panose="020B0503020204020204" pitchFamily="34" charset="0"/>
+              </a:rPr>
+              <a:t>, </a:t>
+            </a:r>
+            <a:r>
+              <a:rPr lang="en-CA" sz="1050" dirty="0" err="1">
+                <a:latin typeface="Corbel" panose="020B0503020204020204" pitchFamily="34" charset="0"/>
+              </a:rPr>
+              <a:t>Enterococcaceae</a:t>
+            </a:r>
+            <a:r>
+              <a:rPr lang="en-CA" sz="1050" dirty="0">
+                <a:latin typeface="Corbel" panose="020B0503020204020204" pitchFamily="34" charset="0"/>
+              </a:rPr>
+              <a:t>, </a:t>
+            </a:r>
+            <a:r>
+              <a:rPr lang="en-CA" sz="1050" dirty="0" err="1">
+                <a:latin typeface="Corbel" panose="020B0503020204020204" pitchFamily="34" charset="0"/>
+              </a:rPr>
+              <a:t>Carnobacteriaceae</a:t>
+            </a:r>
+            <a:r>
+              <a:rPr lang="en-CA" sz="1050" dirty="0">
+                <a:latin typeface="Corbel" panose="020B0503020204020204" pitchFamily="34" charset="0"/>
+              </a:rPr>
+              <a:t>): Backbone of dairy, cereal, and vegetable fermentations.</a:t>
+            </a:r>
+          </a:p>
+          <a:p>
+            <a:pPr marL="171450" indent="-171450">
+              <a:spcAft>
+                <a:spcPts val="600"/>
+              </a:spcAft>
+              <a:buFont typeface="Arial" panose="020B0604020202020204" pitchFamily="34" charset="0"/>
+              <a:buChar char="•"/>
+            </a:pPr>
+            <a:r>
+              <a:rPr lang="en-CA" sz="1050" b="1" dirty="0">
+                <a:latin typeface="Corbel" panose="020B0503020204020204" pitchFamily="34" charset="0"/>
+              </a:rPr>
+              <a:t>Initiators: </a:t>
+            </a:r>
+            <a:r>
+              <a:rPr lang="en-CA" sz="1050" dirty="0">
+                <a:latin typeface="Corbel" panose="020B0503020204020204" pitchFamily="34" charset="0"/>
+              </a:rPr>
+              <a:t>Enterobacteriaceae, </a:t>
+            </a:r>
+            <a:r>
+              <a:rPr lang="en-CA" sz="1050" dirty="0" err="1">
+                <a:latin typeface="Corbel" panose="020B0503020204020204" pitchFamily="34" charset="0"/>
+              </a:rPr>
+              <a:t>Erwiniaceae</a:t>
+            </a:r>
+            <a:r>
+              <a:rPr lang="en-CA" sz="1050" dirty="0">
+                <a:latin typeface="Corbel" panose="020B0503020204020204" pitchFamily="34" charset="0"/>
+              </a:rPr>
+              <a:t>: Start spontaneous fermentations in vegetables, cereals, tubers, coffee, and cocoa.</a:t>
+            </a:r>
+          </a:p>
+          <a:p>
+            <a:pPr marL="171450" indent="-171450">
+              <a:spcAft>
+                <a:spcPts val="600"/>
+              </a:spcAft>
+              <a:buFont typeface="Arial" panose="020B0604020202020204" pitchFamily="34" charset="0"/>
+              <a:buChar char="•"/>
+            </a:pPr>
+            <a:r>
+              <a:rPr lang="en-CA" sz="1050" b="1" dirty="0">
+                <a:latin typeface="Corbel" panose="020B0503020204020204" pitchFamily="34" charset="0"/>
+              </a:rPr>
+              <a:t>Niche Specialists: </a:t>
+            </a:r>
+            <a:r>
+              <a:rPr lang="en-CA" sz="1050" dirty="0">
+                <a:latin typeface="Corbel" panose="020B0503020204020204" pitchFamily="34" charset="0"/>
+              </a:rPr>
+              <a:t>Acetobacteraceae, </a:t>
+            </a:r>
+            <a:r>
+              <a:rPr lang="en-CA" sz="1050" dirty="0" err="1">
+                <a:latin typeface="Corbel" panose="020B0503020204020204" pitchFamily="34" charset="0"/>
+              </a:rPr>
+              <a:t>Bacillaceae</a:t>
+            </a:r>
+            <a:r>
+              <a:rPr lang="en-CA" sz="1050" dirty="0">
+                <a:latin typeface="Corbel" panose="020B0503020204020204" pitchFamily="34" charset="0"/>
+              </a:rPr>
+              <a:t>, </a:t>
+            </a:r>
+            <a:r>
+              <a:rPr lang="en-CA" sz="1050" dirty="0" err="1">
+                <a:latin typeface="Corbel" panose="020B0503020204020204" pitchFamily="34" charset="0"/>
+              </a:rPr>
+              <a:t>Propionibacteriaceae</a:t>
+            </a:r>
+            <a:r>
+              <a:rPr lang="en-CA" sz="1050" dirty="0">
+                <a:latin typeface="Corbel" panose="020B0503020204020204" pitchFamily="34" charset="0"/>
+              </a:rPr>
+              <a:t>: Define vinegar, natto, soy/fish sauces, and Swiss cheese fermentations.</a:t>
+            </a:r>
+          </a:p>
+          <a:p>
+            <a:pPr marL="171450" indent="-171450">
+              <a:spcAft>
+                <a:spcPts val="600"/>
+              </a:spcAft>
+              <a:buFont typeface="Arial" panose="020B0604020202020204" pitchFamily="34" charset="0"/>
+              <a:buChar char="•"/>
+            </a:pPr>
+            <a:r>
+              <a:rPr lang="en-CA" sz="1050" b="1" dirty="0">
+                <a:latin typeface="Corbel" panose="020B0503020204020204" pitchFamily="34" charset="0"/>
+              </a:rPr>
+              <a:t>Surface &amp; Meat Fermenters: </a:t>
+            </a:r>
+            <a:r>
+              <a:rPr lang="en-CA" sz="1050" dirty="0" err="1">
+                <a:latin typeface="Corbel" panose="020B0503020204020204" pitchFamily="34" charset="0"/>
+              </a:rPr>
+              <a:t>Staphylococcaceae</a:t>
+            </a:r>
+            <a:r>
+              <a:rPr lang="en-CA" sz="1050" dirty="0">
+                <a:latin typeface="Corbel" panose="020B0503020204020204" pitchFamily="34" charset="0"/>
+              </a:rPr>
+              <a:t>, </a:t>
+            </a:r>
+            <a:r>
+              <a:rPr lang="en-CA" sz="1050" dirty="0" err="1">
+                <a:latin typeface="Corbel" panose="020B0503020204020204" pitchFamily="34" charset="0"/>
+              </a:rPr>
+              <a:t>Micrococcaceae</a:t>
+            </a:r>
+            <a:r>
+              <a:rPr lang="en-CA" sz="1050" dirty="0">
+                <a:latin typeface="Corbel" panose="020B0503020204020204" pitchFamily="34" charset="0"/>
+              </a:rPr>
+              <a:t>, </a:t>
+            </a:r>
+            <a:r>
+              <a:rPr lang="en-CA" sz="1050" dirty="0" err="1">
+                <a:latin typeface="Corbel" panose="020B0503020204020204" pitchFamily="34" charset="0"/>
+              </a:rPr>
+              <a:t>Brevibacteriaceae</a:t>
+            </a:r>
+            <a:r>
+              <a:rPr lang="en-CA" sz="1050" dirty="0">
+                <a:latin typeface="Corbel" panose="020B0503020204020204" pitchFamily="34" charset="0"/>
+              </a:rPr>
+              <a:t>: Drive ripening, aroma, and safety in meat and cheese fermentations.</a:t>
+            </a:r>
+          </a:p>
+          <a:p>
+            <a:pPr marL="171450" indent="-171450">
+              <a:spcAft>
+                <a:spcPts val="600"/>
+              </a:spcAft>
+              <a:buFont typeface="Arial" panose="020B0604020202020204" pitchFamily="34" charset="0"/>
+              <a:buChar char="•"/>
+            </a:pPr>
+            <a:r>
+              <a:rPr lang="en-CA" sz="1050" b="1" dirty="0">
+                <a:latin typeface="Corbel" panose="020B0503020204020204" pitchFamily="34" charset="0"/>
+              </a:rPr>
+              <a:t>Minor but Emerging: </a:t>
+            </a:r>
+            <a:r>
+              <a:rPr lang="en-CA" sz="1050" dirty="0" err="1">
+                <a:latin typeface="Corbel" panose="020B0503020204020204" pitchFamily="34" charset="0"/>
+              </a:rPr>
+              <a:t>Eggerthellaceae</a:t>
+            </a:r>
+            <a:r>
+              <a:rPr lang="en-CA" sz="1050" dirty="0">
+                <a:latin typeface="Corbel" panose="020B0503020204020204" pitchFamily="34" charset="0"/>
+              </a:rPr>
+              <a:t>: Secondary role in vegetable fermentations like sauerkraut and kimchi.</a:t>
+            </a:r>
+          </a:p>
+        </p:txBody>
+      </p:sp>
+      <p:sp>
+        <p:nvSpPr>
+          <p:cNvPr id="19" name="TextBox 18">
+            <a:extLst>
+              <a:ext uri="{FF2B5EF4-FFF2-40B4-BE49-F238E27FC236}">
+                <a16:creationId xmlns:a16="http://schemas.microsoft.com/office/drawing/2014/main" id="{04711503-F0BA-F9CB-98A5-CA0A13219011}"/>
+              </a:ext>
+            </a:extLst>
+          </p:cNvPr>
+          <p:cNvSpPr txBox="1"/>
+          <p:nvPr/>
+        </p:nvSpPr>
+        <p:spPr>
+          <a:xfrm>
+            <a:off x="943303" y="4747111"/>
+            <a:ext cx="4156316" cy="705258"/>
+          </a:xfrm>
+          <a:prstGeom prst="rect">
+            <a:avLst/>
+          </a:prstGeom>
+          <a:noFill/>
+          <a:ln>
+            <a:noFill/>
+          </a:ln>
+        </p:spPr>
+        <p:txBody>
+          <a:bodyPr wrap="square">
+            <a:spAutoFit/>
+          </a:bodyPr>
+          <a:lstStyle/>
+          <a:p>
+            <a:pPr>
+              <a:lnSpc>
+                <a:spcPct val="150000"/>
+              </a:lnSpc>
+              <a:buNone/>
+            </a:pPr>
+            <a:r>
+              <a:rPr lang="en-CA" sz="1400" b="1" dirty="0">
+                <a:latin typeface="Corbel" panose="020B0503020204020204" pitchFamily="34" charset="0"/>
+              </a:rPr>
+              <a:t>Understanding these families helps optimize nutrition, flavor, and safety.</a:t>
+            </a:r>
+          </a:p>
+        </p:txBody>
+      </p:sp>
+    </p:spTree>
+    <p:extLst>
+      <p:ext uri="{BB962C8B-B14F-4D97-AF65-F5344CB8AC3E}">
+        <p14:creationId xmlns:p14="http://schemas.microsoft.com/office/powerpoint/2010/main" val="574870349"/>
+      </p:ext>
+    </p:extLst>
+  </p:cSld>
+  <p:clrMapOvr>
+    <a:masterClrMapping/>
+  </p:clrMapOvr>
+</p:sld>
+</file>
+
 <file path=ppt/theme/theme1.xml><?xml version="1.0" encoding="utf-8"?>
 <a:theme xmlns:a="http://schemas.openxmlformats.org/drawingml/2006/main" name="Office Theme">
   <a:themeElements>
